--- a/final_presentation.pptx
+++ b/final_presentation.pptx
@@ -3867,7 +3867,7 @@
               </a:defRPr>
             </a:pPr>
             <a:r>
-              <a:t>• Poor performance on small datasets: ~60% on CIFAR-10 without pre-training</a:t>
+              <a:t>• Poor performance on small datasets: ~40% on CIFAR-10 without pre-training</a:t>
             </a:r>
           </a:p>
         </p:txBody>
@@ -3999,7 +3999,7 @@
               </a:defRPr>
             </a:pPr>
             <a:r>
-              <a:t>• Result: 7.5% better accuracy on CIFAR-10 with same training data</a:t>
+              <a:t>• Result: 13% better accuracy on CIFAR-10 with same training data</a:t>
             </a:r>
           </a:p>
         </p:txBody>
@@ -5239,7 +5239,7 @@
         <p:spPr>
           <a:xfrm>
             <a:off x="274320" y="1005840"/>
-            <a:ext cx="8595360" cy="4199570"/>
+            <a:ext cx="8595360" cy="4297680"/>
           </a:xfrm>
           <a:prstGeom prst="rect">
             <a:avLst/>
